--- a/article/ppt/Chapter03_local.pptx
+++ b/article/ppt/Chapter03_local.pptx
@@ -9,7 +9,7 @@
     <p:sldId id="257" r:id="rId8"/>
     <p:sldId id="258" r:id="rId9"/>
   </p:sldIdLst>
-  <p:sldSz cx="9144000" cy="9144000" type="screen4x3"/>
+  <p:sldSz cx="9144000" cy="11887200" type="screen4x3"/>
   <p:notesSz cx="6858000" cy="9144000"/>
   <p:defaultTextStyle>
     <a:defPPr>
@@ -3260,6 +3260,64 @@
                 <a:latin typeface="Arial"/>
               </a:rPr>
               <a:t>(c)</a:t>
+            </a:r>
+          </a:p>
+        </p:txBody>
+      </p:sp>
+      <p:pic>
+        <p:nvPicPr>
+          <p:cNvPr id="8" name="Picture 7" descr="chain_corners.png"/>
+          <p:cNvPicPr>
+            <a:picLocks noChangeAspect="1"/>
+          </p:cNvPicPr>
+          <p:nvPr/>
+        </p:nvPicPr>
+        <p:blipFill>
+          <a:blip r:embed="rId5"/>
+          <a:stretch>
+            <a:fillRect/>
+          </a:stretch>
+        </p:blipFill>
+        <p:spPr>
+          <a:xfrm>
+            <a:off x="228600" y="8530492"/>
+            <a:ext cx="8686800" cy="2553272"/>
+          </a:xfrm>
+          <a:prstGeom prst="rect">
+            <a:avLst/>
+          </a:prstGeom>
+        </p:spPr>
+      </p:pic>
+      <p:sp>
+        <p:nvSpPr>
+          <p:cNvPr id="9" name="TextBox 8"/>
+          <p:cNvSpPr txBox="1"/>
+          <p:nvPr/>
+        </p:nvSpPr>
+        <p:spPr>
+          <a:xfrm>
+            <a:off x="265176" y="8548780"/>
+            <a:ext cx="457200" cy="274320"/>
+          </a:xfrm>
+          <a:prstGeom prst="rect">
+            <a:avLst/>
+          </a:prstGeom>
+          <a:noFill/>
+        </p:spPr>
+        <p:txBody>
+          <a:bodyPr wrap="none" lIns="0" rIns="0" tIns="0" bIns="0">
+            <a:spAutoFit/>
+          </a:bodyPr>
+          <a:lstStyle/>
+          <a:p>
+            <a:r>
+              <a:rPr b="1" sz="1500">
+                <a:solidFill>
+                  <a:srgbClr val="202020"/>
+                </a:solidFill>
+                <a:latin typeface="Arial"/>
+              </a:rPr>
+              <a:t>(d)</a:t>
             </a:r>
           </a:p>
         </p:txBody>

--- a/article/ppt/Chapter03_local.pptx
+++ b/article/ppt/Chapter03_local.pptx
@@ -3665,7 +3665,7 @@
         <p:spPr>
           <a:xfrm>
             <a:off x="4645152" y="384048"/>
-            <a:ext cx="4270248" cy="2914387"/>
+            <a:ext cx="4270248" cy="2922200"/>
           </a:xfrm>
           <a:prstGeom prst="rect">
             <a:avLst/>
@@ -3722,7 +3722,7 @@
         </p:blipFill>
         <p:spPr>
           <a:xfrm>
-            <a:off x="228600" y="3444739"/>
+            <a:off x="228600" y="3452552"/>
             <a:ext cx="4270248" cy="2875243"/>
           </a:xfrm>
           <a:prstGeom prst="rect">
@@ -3738,7 +3738,7 @@
         </p:nvSpPr>
         <p:spPr>
           <a:xfrm>
-            <a:off x="265176" y="3463027"/>
+            <a:off x="265176" y="3470840"/>
             <a:ext cx="457200" cy="274320"/>
           </a:xfrm>
           <a:prstGeom prst="rect">
@@ -3780,7 +3780,7 @@
         </p:blipFill>
         <p:spPr>
           <a:xfrm>
-            <a:off x="4645152" y="3444739"/>
+            <a:off x="4645152" y="3452552"/>
             <a:ext cx="4270248" cy="2893579"/>
           </a:xfrm>
           <a:prstGeom prst="rect">
@@ -3796,7 +3796,7 @@
         </p:nvSpPr>
         <p:spPr>
           <a:xfrm>
-            <a:off x="4681728" y="3463027"/>
+            <a:off x="4681728" y="3470840"/>
             <a:ext cx="457200" cy="274320"/>
           </a:xfrm>
           <a:prstGeom prst="rect">

--- a/article/ppt/Chapter03_local.pptx
+++ b/article/ppt/Chapter03_local.pptx
@@ -3357,7 +3357,7 @@
         <p:spPr>
           <a:xfrm>
             <a:off x="228600" y="384048"/>
-            <a:ext cx="4270248" cy="2919338"/>
+            <a:ext cx="2798064" cy="1912885"/>
           </a:xfrm>
           <a:prstGeom prst="rect">
             <a:avLst/>
@@ -3414,8 +3414,8 @@
         </p:blipFill>
         <p:spPr>
           <a:xfrm>
-            <a:off x="4645152" y="384048"/>
-            <a:ext cx="4270248" cy="2905027"/>
+            <a:off x="3172968" y="384048"/>
+            <a:ext cx="2798064" cy="1903508"/>
           </a:xfrm>
           <a:prstGeom prst="rect">
             <a:avLst/>
@@ -3430,7 +3430,7 @@
         </p:nvSpPr>
         <p:spPr>
           <a:xfrm>
-            <a:off x="4681728" y="402336"/>
+            <a:off x="3209544" y="402336"/>
             <a:ext cx="457200" cy="274320"/>
           </a:xfrm>
           <a:prstGeom prst="rect">
@@ -3472,8 +3472,8 @@
         </p:blipFill>
         <p:spPr>
           <a:xfrm>
-            <a:off x="228600" y="3449690"/>
-            <a:ext cx="4270248" cy="2902165"/>
+            <a:off x="6117336" y="384048"/>
+            <a:ext cx="2798064" cy="1901633"/>
           </a:xfrm>
           <a:prstGeom prst="rect">
             <a:avLst/>
@@ -3488,7 +3488,7 @@
         </p:nvSpPr>
         <p:spPr>
           <a:xfrm>
-            <a:off x="265176" y="3467978"/>
+            <a:off x="6153912" y="402336"/>
             <a:ext cx="457200" cy="274320"/>
           </a:xfrm>
           <a:prstGeom prst="rect">
@@ -3530,7 +3530,7 @@
         </p:blipFill>
         <p:spPr>
           <a:xfrm>
-            <a:off x="4645152" y="3449690"/>
+            <a:off x="228600" y="2443237"/>
             <a:ext cx="4270248" cy="2899902"/>
           </a:xfrm>
           <a:prstGeom prst="rect">
@@ -3546,7 +3546,7 @@
         </p:nvSpPr>
         <p:spPr>
           <a:xfrm>
-            <a:off x="4681728" y="3467978"/>
+            <a:off x="265176" y="2461525"/>
             <a:ext cx="457200" cy="274320"/>
           </a:xfrm>
           <a:prstGeom prst="rect">
@@ -3568,6 +3568,64 @@
                 <a:latin typeface="Arial"/>
               </a:rPr>
               <a:t>(d)</a:t>
+            </a:r>
+          </a:p>
+        </p:txBody>
+      </p:sp>
+      <p:pic>
+        <p:nvPicPr>
+          <p:cNvPr id="10" name="Picture 9" descr="abl_readflip.png"/>
+          <p:cNvPicPr>
+            <a:picLocks noChangeAspect="1"/>
+          </p:cNvPicPr>
+          <p:nvPr/>
+        </p:nvPicPr>
+        <p:blipFill>
+          <a:blip r:embed="rId6"/>
+          <a:stretch>
+            <a:fillRect/>
+          </a:stretch>
+        </p:blipFill>
+        <p:spPr>
+          <a:xfrm>
+            <a:off x="4645152" y="2443237"/>
+            <a:ext cx="4270248" cy="2888781"/>
+          </a:xfrm>
+          <a:prstGeom prst="rect">
+            <a:avLst/>
+          </a:prstGeom>
+        </p:spPr>
+      </p:pic>
+      <p:sp>
+        <p:nvSpPr>
+          <p:cNvPr id="11" name="TextBox 10"/>
+          <p:cNvSpPr txBox="1"/>
+          <p:nvPr/>
+        </p:nvSpPr>
+        <p:spPr>
+          <a:xfrm>
+            <a:off x="4681728" y="2461525"/>
+            <a:ext cx="457200" cy="274320"/>
+          </a:xfrm>
+          <a:prstGeom prst="rect">
+            <a:avLst/>
+          </a:prstGeom>
+          <a:noFill/>
+        </p:spPr>
+        <p:txBody>
+          <a:bodyPr wrap="none" lIns="0" rIns="0" tIns="0" bIns="0">
+            <a:spAutoFit/>
+          </a:bodyPr>
+          <a:lstStyle/>
+          <a:p>
+            <a:r>
+              <a:rPr b="1" sz="1500">
+                <a:solidFill>
+                  <a:srgbClr val="202020"/>
+                </a:solidFill>
+                <a:latin typeface="Arial"/>
+              </a:rPr>
+              <a:t>(e)</a:t>
             </a:r>
           </a:p>
         </p:txBody>

--- a/article/ppt/Chapter03_local.pptx
+++ b/article/ppt/Chapter03_local.pptx
@@ -3665,7 +3665,7 @@
         <p:spPr>
           <a:xfrm>
             <a:off x="228600" y="384048"/>
-            <a:ext cx="4270248" cy="2843100"/>
+            <a:ext cx="2798064" cy="1862931"/>
           </a:xfrm>
           <a:prstGeom prst="rect">
             <a:avLst/>
@@ -3722,8 +3722,8 @@
         </p:blipFill>
         <p:spPr>
           <a:xfrm>
-            <a:off x="4645152" y="384048"/>
-            <a:ext cx="4270248" cy="2922200"/>
+            <a:off x="3172968" y="384048"/>
+            <a:ext cx="2798064" cy="1914760"/>
           </a:xfrm>
           <a:prstGeom prst="rect">
             <a:avLst/>
@@ -3738,7 +3738,7 @@
         </p:nvSpPr>
         <p:spPr>
           <a:xfrm>
-            <a:off x="4681728" y="402336"/>
+            <a:off x="3209544" y="402336"/>
             <a:ext cx="457200" cy="274320"/>
           </a:xfrm>
           <a:prstGeom prst="rect">
@@ -3780,8 +3780,8 @@
         </p:blipFill>
         <p:spPr>
           <a:xfrm>
-            <a:off x="228600" y="3452552"/>
-            <a:ext cx="4270248" cy="2875243"/>
+            <a:off x="6117336" y="384048"/>
+            <a:ext cx="2798064" cy="1883992"/>
           </a:xfrm>
           <a:prstGeom prst="rect">
             <a:avLst/>
@@ -3796,7 +3796,7 @@
         </p:nvSpPr>
         <p:spPr>
           <a:xfrm>
-            <a:off x="265176" y="3470840"/>
+            <a:off x="6153912" y="402336"/>
             <a:ext cx="457200" cy="274320"/>
           </a:xfrm>
           <a:prstGeom prst="rect">
@@ -3838,7 +3838,7 @@
         </p:blipFill>
         <p:spPr>
           <a:xfrm>
-            <a:off x="4645152" y="3452552"/>
+            <a:off x="228600" y="2445112"/>
             <a:ext cx="4270248" cy="2893579"/>
           </a:xfrm>
           <a:prstGeom prst="rect">
@@ -3854,7 +3854,7 @@
         </p:nvSpPr>
         <p:spPr>
           <a:xfrm>
-            <a:off x="4681728" y="3470840"/>
+            <a:off x="265176" y="2463400"/>
             <a:ext cx="457200" cy="274320"/>
           </a:xfrm>
           <a:prstGeom prst="rect">
@@ -3876,6 +3876,64 @@
                 <a:latin typeface="Arial"/>
               </a:rPr>
               <a:t>(d)</a:t>
+            </a:r>
+          </a:p>
+        </p:txBody>
+      </p:sp>
+      <p:pic>
+        <p:nvPicPr>
+          <p:cNvPr id="10" name="Picture 9" descr="caliber_crossover.png"/>
+          <p:cNvPicPr>
+            <a:picLocks noChangeAspect="1"/>
+          </p:cNvPicPr>
+          <p:nvPr/>
+        </p:nvPicPr>
+        <p:blipFill>
+          <a:blip r:embed="rId6"/>
+          <a:stretch>
+            <a:fillRect/>
+          </a:stretch>
+        </p:blipFill>
+        <p:spPr>
+          <a:xfrm>
+            <a:off x="4645152" y="2445112"/>
+            <a:ext cx="4270248" cy="2897972"/>
+          </a:xfrm>
+          <a:prstGeom prst="rect">
+            <a:avLst/>
+          </a:prstGeom>
+        </p:spPr>
+      </p:pic>
+      <p:sp>
+        <p:nvSpPr>
+          <p:cNvPr id="11" name="TextBox 10"/>
+          <p:cNvSpPr txBox="1"/>
+          <p:nvPr/>
+        </p:nvSpPr>
+        <p:spPr>
+          <a:xfrm>
+            <a:off x="4681728" y="2463400"/>
+            <a:ext cx="457200" cy="274320"/>
+          </a:xfrm>
+          <a:prstGeom prst="rect">
+            <a:avLst/>
+          </a:prstGeom>
+          <a:noFill/>
+        </p:spPr>
+        <p:txBody>
+          <a:bodyPr wrap="none" lIns="0" rIns="0" tIns="0" bIns="0">
+            <a:spAutoFit/>
+          </a:bodyPr>
+          <a:lstStyle/>
+          <a:p>
+            <a:r>
+              <a:rPr b="1" sz="1500">
+                <a:solidFill>
+                  <a:srgbClr val="202020"/>
+                </a:solidFill>
+                <a:latin typeface="Arial"/>
+              </a:rPr>
+              <a:t>(e)</a:t>
             </a:r>
           </a:p>
         </p:txBody>

--- a/article/ppt/Chapter03_local.pptx
+++ b/article/ppt/Chapter03_local.pptx
@@ -3897,7 +3897,7 @@
         <p:spPr>
           <a:xfrm>
             <a:off x="4645152" y="2445112"/>
-            <a:ext cx="4270248" cy="2897972"/>
+            <a:ext cx="4270248" cy="2974185"/>
           </a:xfrm>
           <a:prstGeom prst="rect">
             <a:avLst/>

--- a/article/ppt/Chapter03_local.pptx
+++ b/article/ppt/Chapter03_local.pptx
@@ -8,6 +8,7 @@
     <p:sldId id="256" r:id="rId7"/>
     <p:sldId id="257" r:id="rId8"/>
     <p:sldId id="258" r:id="rId9"/>
+    <p:sldId id="259" r:id="rId10"/>
   </p:sldIdLst>
   <p:sldSz cx="9144000" cy="11887200" type="screen4x3"/>
   <p:notesSz cx="6858000" cy="9144000"/>
@@ -3092,6 +3093,256 @@
       <p:grpSpPr/>
       <p:pic>
         <p:nvPicPr>
+          <p:cNvPr id="2" name="Picture 1" descr="tts_factor.png"/>
+          <p:cNvPicPr>
+            <a:picLocks noChangeAspect="1"/>
+          </p:cNvPicPr>
+          <p:nvPr/>
+        </p:nvPicPr>
+        <p:blipFill>
+          <a:blip r:embed="rId2"/>
+          <a:stretch>
+            <a:fillRect/>
+          </a:stretch>
+        </p:blipFill>
+        <p:spPr>
+          <a:xfrm>
+            <a:off x="228600" y="384048"/>
+            <a:ext cx="8686800" cy="2682524"/>
+          </a:xfrm>
+          <a:prstGeom prst="rect">
+            <a:avLst/>
+          </a:prstGeom>
+        </p:spPr>
+      </p:pic>
+      <p:sp>
+        <p:nvSpPr>
+          <p:cNvPr id="3" name="TextBox 2"/>
+          <p:cNvSpPr txBox="1"/>
+          <p:nvPr/>
+        </p:nvSpPr>
+        <p:spPr>
+          <a:xfrm>
+            <a:off x="265176" y="402336"/>
+            <a:ext cx="457200" cy="274320"/>
+          </a:xfrm>
+          <a:prstGeom prst="rect">
+            <a:avLst/>
+          </a:prstGeom>
+          <a:noFill/>
+        </p:spPr>
+        <p:txBody>
+          <a:bodyPr wrap="none" lIns="0" rIns="0" tIns="0" bIns="0">
+            <a:spAutoFit/>
+          </a:bodyPr>
+          <a:lstStyle/>
+          <a:p>
+            <a:r>
+              <a:rPr b="1" sz="1500">
+                <a:solidFill>
+                  <a:srgbClr val="202020"/>
+                </a:solidFill>
+                <a:latin typeface="Arial"/>
+              </a:rPr>
+              <a:t>(a)</a:t>
+            </a:r>
+          </a:p>
+        </p:txBody>
+      </p:sp>
+      <p:pic>
+        <p:nvPicPr>
+          <p:cNvPr id="4" name="Picture 3" descr="tts_maxcut.png"/>
+          <p:cNvPicPr>
+            <a:picLocks noChangeAspect="1"/>
+          </p:cNvPicPr>
+          <p:nvPr/>
+        </p:nvPicPr>
+        <p:blipFill>
+          <a:blip r:embed="rId3"/>
+          <a:stretch>
+            <a:fillRect/>
+          </a:stretch>
+        </p:blipFill>
+        <p:spPr>
+          <a:xfrm>
+            <a:off x="228600" y="3212876"/>
+            <a:ext cx="4270248" cy="2922200"/>
+          </a:xfrm>
+          <a:prstGeom prst="rect">
+            <a:avLst/>
+          </a:prstGeom>
+        </p:spPr>
+      </p:pic>
+      <p:sp>
+        <p:nvSpPr>
+          <p:cNvPr id="5" name="TextBox 4"/>
+          <p:cNvSpPr txBox="1"/>
+          <p:nvPr/>
+        </p:nvSpPr>
+        <p:spPr>
+          <a:xfrm>
+            <a:off x="265176" y="3231164"/>
+            <a:ext cx="457200" cy="274320"/>
+          </a:xfrm>
+          <a:prstGeom prst="rect">
+            <a:avLst/>
+          </a:prstGeom>
+          <a:noFill/>
+        </p:spPr>
+        <p:txBody>
+          <a:bodyPr wrap="none" lIns="0" rIns="0" tIns="0" bIns="0">
+            <a:spAutoFit/>
+          </a:bodyPr>
+          <a:lstStyle/>
+          <a:p>
+            <a:r>
+              <a:rPr b="1" sz="1500">
+                <a:solidFill>
+                  <a:srgbClr val="202020"/>
+                </a:solidFill>
+                <a:latin typeface="Arial"/>
+              </a:rPr>
+              <a:t>(b)</a:t>
+            </a:r>
+          </a:p>
+        </p:txBody>
+      </p:sp>
+      <p:pic>
+        <p:nvPicPr>
+          <p:cNvPr id="6" name="Picture 5" descr="tts_tsp.png"/>
+          <p:cNvPicPr>
+            <a:picLocks noChangeAspect="1"/>
+          </p:cNvPicPr>
+          <p:nvPr/>
+        </p:nvPicPr>
+        <p:blipFill>
+          <a:blip r:embed="rId4"/>
+          <a:stretch>
+            <a:fillRect/>
+          </a:stretch>
+        </p:blipFill>
+        <p:spPr>
+          <a:xfrm>
+            <a:off x="4645152" y="3212876"/>
+            <a:ext cx="4270248" cy="2914387"/>
+          </a:xfrm>
+          <a:prstGeom prst="rect">
+            <a:avLst/>
+          </a:prstGeom>
+        </p:spPr>
+      </p:pic>
+      <p:sp>
+        <p:nvSpPr>
+          <p:cNvPr id="7" name="TextBox 6"/>
+          <p:cNvSpPr txBox="1"/>
+          <p:nvPr/>
+        </p:nvSpPr>
+        <p:spPr>
+          <a:xfrm>
+            <a:off x="4681728" y="3231164"/>
+            <a:ext cx="457200" cy="274320"/>
+          </a:xfrm>
+          <a:prstGeom prst="rect">
+            <a:avLst/>
+          </a:prstGeom>
+          <a:noFill/>
+        </p:spPr>
+        <p:txBody>
+          <a:bodyPr wrap="none" lIns="0" rIns="0" tIns="0" bIns="0">
+            <a:spAutoFit/>
+          </a:bodyPr>
+          <a:lstStyle/>
+          <a:p>
+            <a:r>
+              <a:rPr b="1" sz="1500">
+                <a:solidFill>
+                  <a:srgbClr val="202020"/>
+                </a:solidFill>
+                <a:latin typeface="Arial"/>
+              </a:rPr>
+              <a:t>(c)</a:t>
+            </a:r>
+          </a:p>
+        </p:txBody>
+      </p:sp>
+      <p:pic>
+        <p:nvPicPr>
+          <p:cNvPr id="8" name="Picture 7" descr="density_sweep.png"/>
+          <p:cNvPicPr>
+            <a:picLocks noChangeAspect="1"/>
+          </p:cNvPicPr>
+          <p:nvPr/>
+        </p:nvPicPr>
+        <p:blipFill>
+          <a:blip r:embed="rId5"/>
+          <a:stretch>
+            <a:fillRect/>
+          </a:stretch>
+        </p:blipFill>
+        <p:spPr>
+          <a:xfrm>
+            <a:off x="228600" y="6281380"/>
+            <a:ext cx="8686800" cy="5773214"/>
+          </a:xfrm>
+          <a:prstGeom prst="rect">
+            <a:avLst/>
+          </a:prstGeom>
+        </p:spPr>
+      </p:pic>
+      <p:sp>
+        <p:nvSpPr>
+          <p:cNvPr id="9" name="TextBox 8"/>
+          <p:cNvSpPr txBox="1"/>
+          <p:nvPr/>
+        </p:nvSpPr>
+        <p:spPr>
+          <a:xfrm>
+            <a:off x="265176" y="6299668"/>
+            <a:ext cx="457200" cy="274320"/>
+          </a:xfrm>
+          <a:prstGeom prst="rect">
+            <a:avLst/>
+          </a:prstGeom>
+          <a:noFill/>
+        </p:spPr>
+        <p:txBody>
+          <a:bodyPr wrap="none" lIns="0" rIns="0" tIns="0" bIns="0">
+            <a:spAutoFit/>
+          </a:bodyPr>
+          <a:lstStyle/>
+          <a:p>
+            <a:r>
+              <a:rPr b="1" sz="1500">
+                <a:solidFill>
+                  <a:srgbClr val="202020"/>
+                </a:solidFill>
+                <a:latin typeface="Arial"/>
+              </a:rPr>
+              <a:t>(d)</a:t>
+            </a:r>
+          </a:p>
+        </p:txBody>
+      </p:sp>
+    </p:spTree>
+  </p:cSld>
+  <p:clrMapOvr>
+    <a:masterClrMapping/>
+  </p:clrMapOvr>
+</p:sld>
+</file>
+
+<file path=ppt/slides/slide2.xml><?xml version="1.0" encoding="utf-8"?>
+<p:sld xmlns:a="http://schemas.openxmlformats.org/drawingml/2006/main" xmlns:p="http://schemas.openxmlformats.org/presentationml/2006/main" xmlns:r="http://schemas.openxmlformats.org/officeDocument/2006/relationships">
+  <p:cSld>
+    <p:spTree>
+      <p:nvGrpSpPr>
+        <p:cNvPr id="1" name=""/>
+        <p:cNvGrpSpPr/>
+        <p:nvPr/>
+      </p:nvGrpSpPr>
+      <p:grpSpPr/>
+      <p:pic>
+        <p:nvPicPr>
           <p:cNvPr id="2" name="Picture 1" descr="chain_schematic.png"/>
           <p:cNvPicPr>
             <a:picLocks noChangeAspect="1"/>
@@ -3330,7 +3581,7 @@
 </p:sld>
 </file>
 
-<file path=ppt/slides/slide2.xml><?xml version="1.0" encoding="utf-8"?>
+<file path=ppt/slides/slide3.xml><?xml version="1.0" encoding="utf-8"?>
 <p:sld xmlns:a="http://schemas.openxmlformats.org/drawingml/2006/main" xmlns:p="http://schemas.openxmlformats.org/presentationml/2006/main" xmlns:r="http://schemas.openxmlformats.org/officeDocument/2006/relationships">
   <p:cSld>
     <p:spTree>
@@ -3638,7 +3889,7 @@
 </p:sld>
 </file>
 
-<file path=ppt/slides/slide3.xml><?xml version="1.0" encoding="utf-8"?>
+<file path=ppt/slides/slide4.xml><?xml version="1.0" encoding="utf-8"?>
 <p:sld xmlns:a="http://schemas.openxmlformats.org/drawingml/2006/main" xmlns:p="http://schemas.openxmlformats.org/presentationml/2006/main" xmlns:r="http://schemas.openxmlformats.org/officeDocument/2006/relationships">
   <p:cSld>
     <p:spTree>
